--- a/public/videos/repositories/sukima-insight/sukima-insight-tech-preview.pptx
+++ b/public/videos/repositories/sukima-insight/sukima-insight-tech-preview.pptx
@@ -134,7 +134,7 @@
           <p:cNvPr id="2" name="タイトル 1">
             <a:extLst>
               <a:ext uri="{FF2B5EF4-FFF2-40B4-BE49-F238E27FC236}">
-                <a16:creationId xmlns:a16="http://schemas.microsoft.com/office/drawing/2014/main" id="{E492B67C-BB08-B7DD-CDAA-E47A18F3F3E0}"/>
+                <a16:creationId xmlns:a16="http://schemas.microsoft.com/office/drawing/2014/main" id="{73AFC3E9-664C-D4ED-17A9-587A0CD3AE96}"/>
               </a:ext>
             </a:extLst>
           </p:cNvPr>
@@ -171,7 +171,7 @@
           <p:cNvPr id="3" name="字幕 2">
             <a:extLst>
               <a:ext uri="{FF2B5EF4-FFF2-40B4-BE49-F238E27FC236}">
-                <a16:creationId xmlns:a16="http://schemas.microsoft.com/office/drawing/2014/main" id="{8063319E-B16E-D0F0-3C6C-FB8F51669CF5}"/>
+                <a16:creationId xmlns:a16="http://schemas.microsoft.com/office/drawing/2014/main" id="{D97EDA48-3159-DAA7-8452-C710CE43A29F}"/>
               </a:ext>
             </a:extLst>
           </p:cNvPr>
@@ -241,7 +241,7 @@
           <p:cNvPr id="4" name="日付プレースホルダー 3">
             <a:extLst>
               <a:ext uri="{FF2B5EF4-FFF2-40B4-BE49-F238E27FC236}">
-                <a16:creationId xmlns:a16="http://schemas.microsoft.com/office/drawing/2014/main" id="{2669DC7E-2C69-9E39-1D5E-D5988C3AE903}"/>
+                <a16:creationId xmlns:a16="http://schemas.microsoft.com/office/drawing/2014/main" id="{DD49437A-60BB-61C1-3EF8-3C8827B8CEF5}"/>
               </a:ext>
             </a:extLst>
           </p:cNvPr>
@@ -257,7 +257,7 @@
           <a:bodyPr/>
           <a:lstStyle/>
           <a:p>
-            <a:fld id="{5B1B3A5F-9029-4640-8A8B-5D70370AC298}" type="datetimeFigureOut">
+            <a:fld id="{CD365D9F-C650-4687-9C48-466A67CDEA81}" type="datetimeFigureOut">
               <a:rPr kumimoji="1" lang="ja-JP" altLang="en-US" smtClean="0"/>
               <a:t>2026/7/30</a:t>
             </a:fld>
@@ -270,7 +270,7 @@
           <p:cNvPr id="5" name="フッター プレースホルダー 4">
             <a:extLst>
               <a:ext uri="{FF2B5EF4-FFF2-40B4-BE49-F238E27FC236}">
-                <a16:creationId xmlns:a16="http://schemas.microsoft.com/office/drawing/2014/main" id="{619942FF-CFFB-A45D-428B-1A17F7AC749C}"/>
+                <a16:creationId xmlns:a16="http://schemas.microsoft.com/office/drawing/2014/main" id="{FA3A27AB-A432-15A2-2ABB-AB50EF8A386B}"/>
               </a:ext>
             </a:extLst>
           </p:cNvPr>
@@ -295,7 +295,7 @@
           <p:cNvPr id="6" name="スライド番号プレースホルダー 5">
             <a:extLst>
               <a:ext uri="{FF2B5EF4-FFF2-40B4-BE49-F238E27FC236}">
-                <a16:creationId xmlns:a16="http://schemas.microsoft.com/office/drawing/2014/main" id="{E92634C1-9E6B-CEDC-01FC-26470D9F8F31}"/>
+                <a16:creationId xmlns:a16="http://schemas.microsoft.com/office/drawing/2014/main" id="{2EE1F45F-D284-4AC5-53CE-6A8F6BD8FD9C}"/>
               </a:ext>
             </a:extLst>
           </p:cNvPr>
@@ -311,7 +311,7 @@
           <a:bodyPr/>
           <a:lstStyle/>
           <a:p>
-            <a:fld id="{C84D4F1C-EB9F-42DA-B81F-4AB702C4DBAC}" type="slidenum">
+            <a:fld id="{CD496522-D5C6-4211-A6D3-1A385CA55376}" type="slidenum">
               <a:rPr kumimoji="1" lang="ja-JP" altLang="en-US" smtClean="0"/>
               <a:t>‹#›</a:t>
             </a:fld>
@@ -322,7 +322,7 @@
     </p:spTree>
     <p:extLst>
       <p:ext uri="{BB962C8B-B14F-4D97-AF65-F5344CB8AC3E}">
-        <p14:creationId xmlns:p14="http://schemas.microsoft.com/office/powerpoint/2010/main" val="1285191554"/>
+        <p14:creationId xmlns:p14="http://schemas.microsoft.com/office/powerpoint/2010/main" val="3368360530"/>
       </p:ext>
     </p:extLst>
   </p:cSld>
@@ -354,7 +354,7 @@
           <p:cNvPr id="2" name="タイトル 1">
             <a:extLst>
               <a:ext uri="{FF2B5EF4-FFF2-40B4-BE49-F238E27FC236}">
-                <a16:creationId xmlns:a16="http://schemas.microsoft.com/office/drawing/2014/main" id="{9D428B86-BA0A-E415-D4DC-E75C9D5A0404}"/>
+                <a16:creationId xmlns:a16="http://schemas.microsoft.com/office/drawing/2014/main" id="{D489A88C-9BD2-C505-88E1-0F7B984568ED}"/>
               </a:ext>
             </a:extLst>
           </p:cNvPr>
@@ -382,7 +382,7 @@
           <p:cNvPr id="3" name="縦書きテキスト プレースホルダー 2">
             <a:extLst>
               <a:ext uri="{FF2B5EF4-FFF2-40B4-BE49-F238E27FC236}">
-                <a16:creationId xmlns:a16="http://schemas.microsoft.com/office/drawing/2014/main" id="{8CFC7B50-D819-B28D-A6C9-603AE964B8F8}"/>
+                <a16:creationId xmlns:a16="http://schemas.microsoft.com/office/drawing/2014/main" id="{6D12914E-9593-B26E-D6B3-48FD291F1BA6}"/>
               </a:ext>
             </a:extLst>
           </p:cNvPr>
@@ -471,7 +471,7 @@
           <p:cNvPr id="4" name="日付プレースホルダー 3">
             <a:extLst>
               <a:ext uri="{FF2B5EF4-FFF2-40B4-BE49-F238E27FC236}">
-                <a16:creationId xmlns:a16="http://schemas.microsoft.com/office/drawing/2014/main" id="{E2B3DC1B-2B9A-E502-C4D6-899F6F6945CE}"/>
+                <a16:creationId xmlns:a16="http://schemas.microsoft.com/office/drawing/2014/main" id="{9D45B1EC-A1C5-1A51-51CC-88BFDB6A2B0D}"/>
               </a:ext>
             </a:extLst>
           </p:cNvPr>
@@ -487,7 +487,7 @@
           <a:bodyPr/>
           <a:lstStyle/>
           <a:p>
-            <a:fld id="{5B1B3A5F-9029-4640-8A8B-5D70370AC298}" type="datetimeFigureOut">
+            <a:fld id="{CD365D9F-C650-4687-9C48-466A67CDEA81}" type="datetimeFigureOut">
               <a:rPr kumimoji="1" lang="ja-JP" altLang="en-US" smtClean="0"/>
               <a:t>2026/7/30</a:t>
             </a:fld>
@@ -500,7 +500,7 @@
           <p:cNvPr id="5" name="フッター プレースホルダー 4">
             <a:extLst>
               <a:ext uri="{FF2B5EF4-FFF2-40B4-BE49-F238E27FC236}">
-                <a16:creationId xmlns:a16="http://schemas.microsoft.com/office/drawing/2014/main" id="{B61C4C08-CB45-6D2C-8D59-5471AFFC1BBA}"/>
+                <a16:creationId xmlns:a16="http://schemas.microsoft.com/office/drawing/2014/main" id="{DE711186-054F-FAB3-0FBE-D5BFE7A63DD1}"/>
               </a:ext>
             </a:extLst>
           </p:cNvPr>
@@ -525,7 +525,7 @@
           <p:cNvPr id="6" name="スライド番号プレースホルダー 5">
             <a:extLst>
               <a:ext uri="{FF2B5EF4-FFF2-40B4-BE49-F238E27FC236}">
-                <a16:creationId xmlns:a16="http://schemas.microsoft.com/office/drawing/2014/main" id="{2FE062BD-B45B-E88C-A29D-82F3C62EE7AC}"/>
+                <a16:creationId xmlns:a16="http://schemas.microsoft.com/office/drawing/2014/main" id="{17093EB1-0149-E2D7-BBB7-DCC16A30C85B}"/>
               </a:ext>
             </a:extLst>
           </p:cNvPr>
@@ -541,7 +541,7 @@
           <a:bodyPr/>
           <a:lstStyle/>
           <a:p>
-            <a:fld id="{C84D4F1C-EB9F-42DA-B81F-4AB702C4DBAC}" type="slidenum">
+            <a:fld id="{CD496522-D5C6-4211-A6D3-1A385CA55376}" type="slidenum">
               <a:rPr kumimoji="1" lang="ja-JP" altLang="en-US" smtClean="0"/>
               <a:t>‹#›</a:t>
             </a:fld>
@@ -552,7 +552,7 @@
     </p:spTree>
     <p:extLst>
       <p:ext uri="{BB962C8B-B14F-4D97-AF65-F5344CB8AC3E}">
-        <p14:creationId xmlns:p14="http://schemas.microsoft.com/office/powerpoint/2010/main" val="1543500046"/>
+        <p14:creationId xmlns:p14="http://schemas.microsoft.com/office/powerpoint/2010/main" val="579352838"/>
       </p:ext>
     </p:extLst>
   </p:cSld>
@@ -584,7 +584,7 @@
           <p:cNvPr id="2" name="縦書きタイトル 1">
             <a:extLst>
               <a:ext uri="{FF2B5EF4-FFF2-40B4-BE49-F238E27FC236}">
-                <a16:creationId xmlns:a16="http://schemas.microsoft.com/office/drawing/2014/main" id="{42D28911-EB0E-D8B1-7968-981AB87A02E3}"/>
+                <a16:creationId xmlns:a16="http://schemas.microsoft.com/office/drawing/2014/main" id="{3FE8D6CF-268B-4463-D094-4D06F052F1F0}"/>
               </a:ext>
             </a:extLst>
           </p:cNvPr>
@@ -617,7 +617,7 @@
           <p:cNvPr id="3" name="縦書きテキスト プレースホルダー 2">
             <a:extLst>
               <a:ext uri="{FF2B5EF4-FFF2-40B4-BE49-F238E27FC236}">
-                <a16:creationId xmlns:a16="http://schemas.microsoft.com/office/drawing/2014/main" id="{5A6A2850-AB24-BE9E-831B-D32B332EFEBE}"/>
+                <a16:creationId xmlns:a16="http://schemas.microsoft.com/office/drawing/2014/main" id="{AFDB7A7D-7C20-E6A8-7DBF-F413FCB0EA27}"/>
               </a:ext>
             </a:extLst>
           </p:cNvPr>
@@ -711,7 +711,7 @@
           <p:cNvPr id="4" name="日付プレースホルダー 3">
             <a:extLst>
               <a:ext uri="{FF2B5EF4-FFF2-40B4-BE49-F238E27FC236}">
-                <a16:creationId xmlns:a16="http://schemas.microsoft.com/office/drawing/2014/main" id="{EA10A117-1FEE-D6AF-D745-EC810E686445}"/>
+                <a16:creationId xmlns:a16="http://schemas.microsoft.com/office/drawing/2014/main" id="{5169A713-5CA2-E38D-079B-98EDB6F9474F}"/>
               </a:ext>
             </a:extLst>
           </p:cNvPr>
@@ -727,7 +727,7 @@
           <a:bodyPr/>
           <a:lstStyle/>
           <a:p>
-            <a:fld id="{5B1B3A5F-9029-4640-8A8B-5D70370AC298}" type="datetimeFigureOut">
+            <a:fld id="{CD365D9F-C650-4687-9C48-466A67CDEA81}" type="datetimeFigureOut">
               <a:rPr kumimoji="1" lang="ja-JP" altLang="en-US" smtClean="0"/>
               <a:t>2026/7/30</a:t>
             </a:fld>
@@ -740,7 +740,7 @@
           <p:cNvPr id="5" name="フッター プレースホルダー 4">
             <a:extLst>
               <a:ext uri="{FF2B5EF4-FFF2-40B4-BE49-F238E27FC236}">
-                <a16:creationId xmlns:a16="http://schemas.microsoft.com/office/drawing/2014/main" id="{EDC82AC9-A142-9E9A-C478-147BDC0B3862}"/>
+                <a16:creationId xmlns:a16="http://schemas.microsoft.com/office/drawing/2014/main" id="{1457E3F9-B30B-583A-9E2F-5F3B354F1D54}"/>
               </a:ext>
             </a:extLst>
           </p:cNvPr>
@@ -765,7 +765,7 @@
           <p:cNvPr id="6" name="スライド番号プレースホルダー 5">
             <a:extLst>
               <a:ext uri="{FF2B5EF4-FFF2-40B4-BE49-F238E27FC236}">
-                <a16:creationId xmlns:a16="http://schemas.microsoft.com/office/drawing/2014/main" id="{4968E490-EC3B-666E-E76F-143FEF06EA94}"/>
+                <a16:creationId xmlns:a16="http://schemas.microsoft.com/office/drawing/2014/main" id="{9F726484-C53F-7074-5ECF-4D3BA00CC8A5}"/>
               </a:ext>
             </a:extLst>
           </p:cNvPr>
@@ -781,7 +781,7 @@
           <a:bodyPr/>
           <a:lstStyle/>
           <a:p>
-            <a:fld id="{C84D4F1C-EB9F-42DA-B81F-4AB702C4DBAC}" type="slidenum">
+            <a:fld id="{CD496522-D5C6-4211-A6D3-1A385CA55376}" type="slidenum">
               <a:rPr kumimoji="1" lang="ja-JP" altLang="en-US" smtClean="0"/>
               <a:t>‹#›</a:t>
             </a:fld>
@@ -792,7 +792,7 @@
     </p:spTree>
     <p:extLst>
       <p:ext uri="{BB962C8B-B14F-4D97-AF65-F5344CB8AC3E}">
-        <p14:creationId xmlns:p14="http://schemas.microsoft.com/office/powerpoint/2010/main" val="3056665865"/>
+        <p14:creationId xmlns:p14="http://schemas.microsoft.com/office/powerpoint/2010/main" val="2154940656"/>
       </p:ext>
     </p:extLst>
   </p:cSld>
@@ -824,7 +824,7 @@
           <p:cNvPr id="2" name="タイトル 1">
             <a:extLst>
               <a:ext uri="{FF2B5EF4-FFF2-40B4-BE49-F238E27FC236}">
-                <a16:creationId xmlns:a16="http://schemas.microsoft.com/office/drawing/2014/main" id="{04D4E558-C1D2-A778-6646-9705E492C60D}"/>
+                <a16:creationId xmlns:a16="http://schemas.microsoft.com/office/drawing/2014/main" id="{6AE0FC78-C68E-BE3F-589B-BF64AA8189B3}"/>
               </a:ext>
             </a:extLst>
           </p:cNvPr>
@@ -852,7 +852,7 @@
           <p:cNvPr id="3" name="コンテンツ プレースホルダー 2">
             <a:extLst>
               <a:ext uri="{FF2B5EF4-FFF2-40B4-BE49-F238E27FC236}">
-                <a16:creationId xmlns:a16="http://schemas.microsoft.com/office/drawing/2014/main" id="{8EF54058-478A-DC81-4F82-41C449C85A82}"/>
+                <a16:creationId xmlns:a16="http://schemas.microsoft.com/office/drawing/2014/main" id="{48DC41D4-10FE-D86D-72B8-8D7A461D7DA7}"/>
               </a:ext>
             </a:extLst>
           </p:cNvPr>
@@ -941,7 +941,7 @@
           <p:cNvPr id="4" name="日付プレースホルダー 3">
             <a:extLst>
               <a:ext uri="{FF2B5EF4-FFF2-40B4-BE49-F238E27FC236}">
-                <a16:creationId xmlns:a16="http://schemas.microsoft.com/office/drawing/2014/main" id="{861B9680-0FD4-7015-9F9C-4C8A15B93030}"/>
+                <a16:creationId xmlns:a16="http://schemas.microsoft.com/office/drawing/2014/main" id="{F8172BB3-7514-F190-1154-3DE8B4DDE672}"/>
               </a:ext>
             </a:extLst>
           </p:cNvPr>
@@ -957,7 +957,7 @@
           <a:bodyPr/>
           <a:lstStyle/>
           <a:p>
-            <a:fld id="{5B1B3A5F-9029-4640-8A8B-5D70370AC298}" type="datetimeFigureOut">
+            <a:fld id="{CD365D9F-C650-4687-9C48-466A67CDEA81}" type="datetimeFigureOut">
               <a:rPr kumimoji="1" lang="ja-JP" altLang="en-US" smtClean="0"/>
               <a:t>2026/7/30</a:t>
             </a:fld>
@@ -970,7 +970,7 @@
           <p:cNvPr id="5" name="フッター プレースホルダー 4">
             <a:extLst>
               <a:ext uri="{FF2B5EF4-FFF2-40B4-BE49-F238E27FC236}">
-                <a16:creationId xmlns:a16="http://schemas.microsoft.com/office/drawing/2014/main" id="{34AD0C81-6048-1134-8721-3CDA3CC37B98}"/>
+                <a16:creationId xmlns:a16="http://schemas.microsoft.com/office/drawing/2014/main" id="{05CDFBA0-BEC2-8736-AACD-8090FFDBF5BB}"/>
               </a:ext>
             </a:extLst>
           </p:cNvPr>
@@ -995,7 +995,7 @@
           <p:cNvPr id="6" name="スライド番号プレースホルダー 5">
             <a:extLst>
               <a:ext uri="{FF2B5EF4-FFF2-40B4-BE49-F238E27FC236}">
-                <a16:creationId xmlns:a16="http://schemas.microsoft.com/office/drawing/2014/main" id="{BFF296A4-9C0F-2793-6751-9B0DE0170859}"/>
+                <a16:creationId xmlns:a16="http://schemas.microsoft.com/office/drawing/2014/main" id="{D8AB0195-6DF2-22BB-1915-C2A318E650DB}"/>
               </a:ext>
             </a:extLst>
           </p:cNvPr>
@@ -1011,7 +1011,7 @@
           <a:bodyPr/>
           <a:lstStyle/>
           <a:p>
-            <a:fld id="{C84D4F1C-EB9F-42DA-B81F-4AB702C4DBAC}" type="slidenum">
+            <a:fld id="{CD496522-D5C6-4211-A6D3-1A385CA55376}" type="slidenum">
               <a:rPr kumimoji="1" lang="ja-JP" altLang="en-US" smtClean="0"/>
               <a:t>‹#›</a:t>
             </a:fld>
@@ -1022,7 +1022,7 @@
     </p:spTree>
     <p:extLst>
       <p:ext uri="{BB962C8B-B14F-4D97-AF65-F5344CB8AC3E}">
-        <p14:creationId xmlns:p14="http://schemas.microsoft.com/office/powerpoint/2010/main" val="27284240"/>
+        <p14:creationId xmlns:p14="http://schemas.microsoft.com/office/powerpoint/2010/main" val="4093567735"/>
       </p:ext>
     </p:extLst>
   </p:cSld>
@@ -1054,7 +1054,7 @@
           <p:cNvPr id="2" name="タイトル 1">
             <a:extLst>
               <a:ext uri="{FF2B5EF4-FFF2-40B4-BE49-F238E27FC236}">
-                <a16:creationId xmlns:a16="http://schemas.microsoft.com/office/drawing/2014/main" id="{0B13A321-87AD-0395-5122-BF010C4F907F}"/>
+                <a16:creationId xmlns:a16="http://schemas.microsoft.com/office/drawing/2014/main" id="{9C067C3E-F3A6-125F-84B9-FE0334F057FB}"/>
               </a:ext>
             </a:extLst>
           </p:cNvPr>
@@ -1091,7 +1091,7 @@
           <p:cNvPr id="3" name="テキスト プレースホルダー 2">
             <a:extLst>
               <a:ext uri="{FF2B5EF4-FFF2-40B4-BE49-F238E27FC236}">
-                <a16:creationId xmlns:a16="http://schemas.microsoft.com/office/drawing/2014/main" id="{DF3EF08A-1DD9-E438-8123-7EF8DC8CD293}"/>
+                <a16:creationId xmlns:a16="http://schemas.microsoft.com/office/drawing/2014/main" id="{87FE98C6-A1A1-5A41-7DB2-459272632069}"/>
               </a:ext>
             </a:extLst>
           </p:cNvPr>
@@ -1216,7 +1216,7 @@
           <p:cNvPr id="4" name="日付プレースホルダー 3">
             <a:extLst>
               <a:ext uri="{FF2B5EF4-FFF2-40B4-BE49-F238E27FC236}">
-                <a16:creationId xmlns:a16="http://schemas.microsoft.com/office/drawing/2014/main" id="{462C4760-C2BE-9839-2CED-34927C871993}"/>
+                <a16:creationId xmlns:a16="http://schemas.microsoft.com/office/drawing/2014/main" id="{C1183349-6176-979A-06CE-9611A85BD989}"/>
               </a:ext>
             </a:extLst>
           </p:cNvPr>
@@ -1232,7 +1232,7 @@
           <a:bodyPr/>
           <a:lstStyle/>
           <a:p>
-            <a:fld id="{5B1B3A5F-9029-4640-8A8B-5D70370AC298}" type="datetimeFigureOut">
+            <a:fld id="{CD365D9F-C650-4687-9C48-466A67CDEA81}" type="datetimeFigureOut">
               <a:rPr kumimoji="1" lang="ja-JP" altLang="en-US" smtClean="0"/>
               <a:t>2026/7/30</a:t>
             </a:fld>
@@ -1245,7 +1245,7 @@
           <p:cNvPr id="5" name="フッター プレースホルダー 4">
             <a:extLst>
               <a:ext uri="{FF2B5EF4-FFF2-40B4-BE49-F238E27FC236}">
-                <a16:creationId xmlns:a16="http://schemas.microsoft.com/office/drawing/2014/main" id="{00382516-06F2-67FA-60AC-A7F3C917A3FB}"/>
+                <a16:creationId xmlns:a16="http://schemas.microsoft.com/office/drawing/2014/main" id="{67114105-E813-CA67-66BE-266F43453AD3}"/>
               </a:ext>
             </a:extLst>
           </p:cNvPr>
@@ -1270,7 +1270,7 @@
           <p:cNvPr id="6" name="スライド番号プレースホルダー 5">
             <a:extLst>
               <a:ext uri="{FF2B5EF4-FFF2-40B4-BE49-F238E27FC236}">
-                <a16:creationId xmlns:a16="http://schemas.microsoft.com/office/drawing/2014/main" id="{2BA07B9E-2C35-3BF5-315D-A8ED6399547D}"/>
+                <a16:creationId xmlns:a16="http://schemas.microsoft.com/office/drawing/2014/main" id="{1A32BFF6-21E6-4950-C946-257DB5A51A30}"/>
               </a:ext>
             </a:extLst>
           </p:cNvPr>
@@ -1286,7 +1286,7 @@
           <a:bodyPr/>
           <a:lstStyle/>
           <a:p>
-            <a:fld id="{C84D4F1C-EB9F-42DA-B81F-4AB702C4DBAC}" type="slidenum">
+            <a:fld id="{CD496522-D5C6-4211-A6D3-1A385CA55376}" type="slidenum">
               <a:rPr kumimoji="1" lang="ja-JP" altLang="en-US" smtClean="0"/>
               <a:t>‹#›</a:t>
             </a:fld>
@@ -1297,7 +1297,7 @@
     </p:spTree>
     <p:extLst>
       <p:ext uri="{BB962C8B-B14F-4D97-AF65-F5344CB8AC3E}">
-        <p14:creationId xmlns:p14="http://schemas.microsoft.com/office/powerpoint/2010/main" val="168718918"/>
+        <p14:creationId xmlns:p14="http://schemas.microsoft.com/office/powerpoint/2010/main" val="1497350561"/>
       </p:ext>
     </p:extLst>
   </p:cSld>
@@ -1329,7 +1329,7 @@
           <p:cNvPr id="2" name="タイトル 1">
             <a:extLst>
               <a:ext uri="{FF2B5EF4-FFF2-40B4-BE49-F238E27FC236}">
-                <a16:creationId xmlns:a16="http://schemas.microsoft.com/office/drawing/2014/main" id="{195988D6-166D-DB81-9986-5CADE42AD3AC}"/>
+                <a16:creationId xmlns:a16="http://schemas.microsoft.com/office/drawing/2014/main" id="{710E3CF3-54DD-B3CB-DE9E-5FB433AC7373}"/>
               </a:ext>
             </a:extLst>
           </p:cNvPr>
@@ -1357,7 +1357,7 @@
           <p:cNvPr id="3" name="コンテンツ プレースホルダー 2">
             <a:extLst>
               <a:ext uri="{FF2B5EF4-FFF2-40B4-BE49-F238E27FC236}">
-                <a16:creationId xmlns:a16="http://schemas.microsoft.com/office/drawing/2014/main" id="{CCBDDEB3-62F9-9826-4F47-EA495344EBE5}"/>
+                <a16:creationId xmlns:a16="http://schemas.microsoft.com/office/drawing/2014/main" id="{105E88E0-5466-D0EC-0BEC-615752A0A781}"/>
               </a:ext>
             </a:extLst>
           </p:cNvPr>
@@ -1451,7 +1451,7 @@
           <p:cNvPr id="4" name="コンテンツ プレースホルダー 3">
             <a:extLst>
               <a:ext uri="{FF2B5EF4-FFF2-40B4-BE49-F238E27FC236}">
-                <a16:creationId xmlns:a16="http://schemas.microsoft.com/office/drawing/2014/main" id="{13DBD51C-6599-4B72-78D5-4120EEA62A3E}"/>
+                <a16:creationId xmlns:a16="http://schemas.microsoft.com/office/drawing/2014/main" id="{A3E4F252-94D5-3971-406A-64C86A2E72CC}"/>
               </a:ext>
             </a:extLst>
           </p:cNvPr>
@@ -1545,7 +1545,7 @@
           <p:cNvPr id="5" name="日付プレースホルダー 4">
             <a:extLst>
               <a:ext uri="{FF2B5EF4-FFF2-40B4-BE49-F238E27FC236}">
-                <a16:creationId xmlns:a16="http://schemas.microsoft.com/office/drawing/2014/main" id="{725AFE24-984F-E717-B67B-9BF04E9651F5}"/>
+                <a16:creationId xmlns:a16="http://schemas.microsoft.com/office/drawing/2014/main" id="{CFF6D107-F432-FCD1-7556-37342262AFC1}"/>
               </a:ext>
             </a:extLst>
           </p:cNvPr>
@@ -1561,7 +1561,7 @@
           <a:bodyPr/>
           <a:lstStyle/>
           <a:p>
-            <a:fld id="{5B1B3A5F-9029-4640-8A8B-5D70370AC298}" type="datetimeFigureOut">
+            <a:fld id="{CD365D9F-C650-4687-9C48-466A67CDEA81}" type="datetimeFigureOut">
               <a:rPr kumimoji="1" lang="ja-JP" altLang="en-US" smtClean="0"/>
               <a:t>2026/7/30</a:t>
             </a:fld>
@@ -1574,7 +1574,7 @@
           <p:cNvPr id="6" name="フッター プレースホルダー 5">
             <a:extLst>
               <a:ext uri="{FF2B5EF4-FFF2-40B4-BE49-F238E27FC236}">
-                <a16:creationId xmlns:a16="http://schemas.microsoft.com/office/drawing/2014/main" id="{1E45C0D0-2CC6-AF6E-89AB-DD436AE67E49}"/>
+                <a16:creationId xmlns:a16="http://schemas.microsoft.com/office/drawing/2014/main" id="{63E6BC94-78AF-CDA9-E2A1-F6851E245E2E}"/>
               </a:ext>
             </a:extLst>
           </p:cNvPr>
@@ -1599,7 +1599,7 @@
           <p:cNvPr id="7" name="スライド番号プレースホルダー 6">
             <a:extLst>
               <a:ext uri="{FF2B5EF4-FFF2-40B4-BE49-F238E27FC236}">
-                <a16:creationId xmlns:a16="http://schemas.microsoft.com/office/drawing/2014/main" id="{38D0513A-1845-CAB4-B19E-D91C6DB6F53C}"/>
+                <a16:creationId xmlns:a16="http://schemas.microsoft.com/office/drawing/2014/main" id="{60B621D1-1617-146A-CDFB-51C1C3EFC9DE}"/>
               </a:ext>
             </a:extLst>
           </p:cNvPr>
@@ -1615,7 +1615,7 @@
           <a:bodyPr/>
           <a:lstStyle/>
           <a:p>
-            <a:fld id="{C84D4F1C-EB9F-42DA-B81F-4AB702C4DBAC}" type="slidenum">
+            <a:fld id="{CD496522-D5C6-4211-A6D3-1A385CA55376}" type="slidenum">
               <a:rPr kumimoji="1" lang="ja-JP" altLang="en-US" smtClean="0"/>
               <a:t>‹#›</a:t>
             </a:fld>
@@ -1626,7 +1626,7 @@
     </p:spTree>
     <p:extLst>
       <p:ext uri="{BB962C8B-B14F-4D97-AF65-F5344CB8AC3E}">
-        <p14:creationId xmlns:p14="http://schemas.microsoft.com/office/powerpoint/2010/main" val="3189784048"/>
+        <p14:creationId xmlns:p14="http://schemas.microsoft.com/office/powerpoint/2010/main" val="1753002775"/>
       </p:ext>
     </p:extLst>
   </p:cSld>
@@ -1658,7 +1658,7 @@
           <p:cNvPr id="2" name="タイトル 1">
             <a:extLst>
               <a:ext uri="{FF2B5EF4-FFF2-40B4-BE49-F238E27FC236}">
-                <a16:creationId xmlns:a16="http://schemas.microsoft.com/office/drawing/2014/main" id="{BC0AE3E7-20CA-A1DF-B9C4-4040FDC63C1C}"/>
+                <a16:creationId xmlns:a16="http://schemas.microsoft.com/office/drawing/2014/main" id="{04F9123B-5946-C422-D00A-A0E38B93C2FA}"/>
               </a:ext>
             </a:extLst>
           </p:cNvPr>
@@ -1691,7 +1691,7 @@
           <p:cNvPr id="3" name="テキスト プレースホルダー 2">
             <a:extLst>
               <a:ext uri="{FF2B5EF4-FFF2-40B4-BE49-F238E27FC236}">
-                <a16:creationId xmlns:a16="http://schemas.microsoft.com/office/drawing/2014/main" id="{36CEDF48-07AE-6149-5146-DEA7DA412DCD}"/>
+                <a16:creationId xmlns:a16="http://schemas.microsoft.com/office/drawing/2014/main" id="{50B54A66-E366-5724-98BC-C13BD978362C}"/>
               </a:ext>
             </a:extLst>
           </p:cNvPr>
@@ -1762,7 +1762,7 @@
           <p:cNvPr id="4" name="コンテンツ プレースホルダー 3">
             <a:extLst>
               <a:ext uri="{FF2B5EF4-FFF2-40B4-BE49-F238E27FC236}">
-                <a16:creationId xmlns:a16="http://schemas.microsoft.com/office/drawing/2014/main" id="{AE5985A3-D103-FA87-956E-C7C1D45819A5}"/>
+                <a16:creationId xmlns:a16="http://schemas.microsoft.com/office/drawing/2014/main" id="{E2690DC2-9830-5FD3-14DE-0DC0731C21BE}"/>
               </a:ext>
             </a:extLst>
           </p:cNvPr>
@@ -1856,7 +1856,7 @@
           <p:cNvPr id="5" name="テキスト プレースホルダー 4">
             <a:extLst>
               <a:ext uri="{FF2B5EF4-FFF2-40B4-BE49-F238E27FC236}">
-                <a16:creationId xmlns:a16="http://schemas.microsoft.com/office/drawing/2014/main" id="{9F4A62ED-D5B0-9F6B-F5D0-9941ADFBDF3C}"/>
+                <a16:creationId xmlns:a16="http://schemas.microsoft.com/office/drawing/2014/main" id="{972BC7AD-18ED-8E3E-8E23-886324149814}"/>
               </a:ext>
             </a:extLst>
           </p:cNvPr>
@@ -1927,7 +1927,7 @@
           <p:cNvPr id="6" name="コンテンツ プレースホルダー 5">
             <a:extLst>
               <a:ext uri="{FF2B5EF4-FFF2-40B4-BE49-F238E27FC236}">
-                <a16:creationId xmlns:a16="http://schemas.microsoft.com/office/drawing/2014/main" id="{A6D05B88-063C-BC2A-538C-3F680B441DA4}"/>
+                <a16:creationId xmlns:a16="http://schemas.microsoft.com/office/drawing/2014/main" id="{97E3AE56-A096-4CE0-681E-C6CEED1E823E}"/>
               </a:ext>
             </a:extLst>
           </p:cNvPr>
@@ -2021,7 +2021,7 @@
           <p:cNvPr id="7" name="日付プレースホルダー 6">
             <a:extLst>
               <a:ext uri="{FF2B5EF4-FFF2-40B4-BE49-F238E27FC236}">
-                <a16:creationId xmlns:a16="http://schemas.microsoft.com/office/drawing/2014/main" id="{B91052E9-B2C6-ED7E-BB3E-658041796DB1}"/>
+                <a16:creationId xmlns:a16="http://schemas.microsoft.com/office/drawing/2014/main" id="{4B522A1B-FA4F-C81C-8E51-F138394B8C5E}"/>
               </a:ext>
             </a:extLst>
           </p:cNvPr>
@@ -2037,7 +2037,7 @@
           <a:bodyPr/>
           <a:lstStyle/>
           <a:p>
-            <a:fld id="{5B1B3A5F-9029-4640-8A8B-5D70370AC298}" type="datetimeFigureOut">
+            <a:fld id="{CD365D9F-C650-4687-9C48-466A67CDEA81}" type="datetimeFigureOut">
               <a:rPr kumimoji="1" lang="ja-JP" altLang="en-US" smtClean="0"/>
               <a:t>2026/7/30</a:t>
             </a:fld>
@@ -2050,7 +2050,7 @@
           <p:cNvPr id="8" name="フッター プレースホルダー 7">
             <a:extLst>
               <a:ext uri="{FF2B5EF4-FFF2-40B4-BE49-F238E27FC236}">
-                <a16:creationId xmlns:a16="http://schemas.microsoft.com/office/drawing/2014/main" id="{0A8BAF67-15FB-97BC-26A1-BE5CD67E87E4}"/>
+                <a16:creationId xmlns:a16="http://schemas.microsoft.com/office/drawing/2014/main" id="{218DB448-E5AB-D72F-74FD-4ACA961A40EE}"/>
               </a:ext>
             </a:extLst>
           </p:cNvPr>
@@ -2075,7 +2075,7 @@
           <p:cNvPr id="9" name="スライド番号プレースホルダー 8">
             <a:extLst>
               <a:ext uri="{FF2B5EF4-FFF2-40B4-BE49-F238E27FC236}">
-                <a16:creationId xmlns:a16="http://schemas.microsoft.com/office/drawing/2014/main" id="{899DA1B6-3F17-568F-24A2-128C9FA248BD}"/>
+                <a16:creationId xmlns:a16="http://schemas.microsoft.com/office/drawing/2014/main" id="{B2C0DE3B-A588-05B5-5227-7DAEF5BC3649}"/>
               </a:ext>
             </a:extLst>
           </p:cNvPr>
@@ -2091,7 +2091,7 @@
           <a:bodyPr/>
           <a:lstStyle/>
           <a:p>
-            <a:fld id="{C84D4F1C-EB9F-42DA-B81F-4AB702C4DBAC}" type="slidenum">
+            <a:fld id="{CD496522-D5C6-4211-A6D3-1A385CA55376}" type="slidenum">
               <a:rPr kumimoji="1" lang="ja-JP" altLang="en-US" smtClean="0"/>
               <a:t>‹#›</a:t>
             </a:fld>
@@ -2102,7 +2102,7 @@
     </p:spTree>
     <p:extLst>
       <p:ext uri="{BB962C8B-B14F-4D97-AF65-F5344CB8AC3E}">
-        <p14:creationId xmlns:p14="http://schemas.microsoft.com/office/powerpoint/2010/main" val="42569252"/>
+        <p14:creationId xmlns:p14="http://schemas.microsoft.com/office/powerpoint/2010/main" val="3404033190"/>
       </p:ext>
     </p:extLst>
   </p:cSld>
@@ -2134,7 +2134,7 @@
           <p:cNvPr id="2" name="タイトル 1">
             <a:extLst>
               <a:ext uri="{FF2B5EF4-FFF2-40B4-BE49-F238E27FC236}">
-                <a16:creationId xmlns:a16="http://schemas.microsoft.com/office/drawing/2014/main" id="{1EFA1132-C06E-5A20-C047-B234FEC44052}"/>
+                <a16:creationId xmlns:a16="http://schemas.microsoft.com/office/drawing/2014/main" id="{DDAC26B1-9ECD-DBD2-CEA6-AF6B3427ED4A}"/>
               </a:ext>
             </a:extLst>
           </p:cNvPr>
@@ -2162,7 +2162,7 @@
           <p:cNvPr id="3" name="日付プレースホルダー 2">
             <a:extLst>
               <a:ext uri="{FF2B5EF4-FFF2-40B4-BE49-F238E27FC236}">
-                <a16:creationId xmlns:a16="http://schemas.microsoft.com/office/drawing/2014/main" id="{6D0C26D1-B02D-684E-0357-8DA7E076C334}"/>
+                <a16:creationId xmlns:a16="http://schemas.microsoft.com/office/drawing/2014/main" id="{C62125BD-9701-6F9F-F1AF-78E0C3593DFD}"/>
               </a:ext>
             </a:extLst>
           </p:cNvPr>
@@ -2178,7 +2178,7 @@
           <a:bodyPr/>
           <a:lstStyle/>
           <a:p>
-            <a:fld id="{5B1B3A5F-9029-4640-8A8B-5D70370AC298}" type="datetimeFigureOut">
+            <a:fld id="{CD365D9F-C650-4687-9C48-466A67CDEA81}" type="datetimeFigureOut">
               <a:rPr kumimoji="1" lang="ja-JP" altLang="en-US" smtClean="0"/>
               <a:t>2026/7/30</a:t>
             </a:fld>
@@ -2191,7 +2191,7 @@
           <p:cNvPr id="4" name="フッター プレースホルダー 3">
             <a:extLst>
               <a:ext uri="{FF2B5EF4-FFF2-40B4-BE49-F238E27FC236}">
-                <a16:creationId xmlns:a16="http://schemas.microsoft.com/office/drawing/2014/main" id="{C884234B-0BA6-9C96-5864-C3A252E83448}"/>
+                <a16:creationId xmlns:a16="http://schemas.microsoft.com/office/drawing/2014/main" id="{FB8F9FC1-B84E-FA97-6F61-08DF62C78215}"/>
               </a:ext>
             </a:extLst>
           </p:cNvPr>
@@ -2216,7 +2216,7 @@
           <p:cNvPr id="5" name="スライド番号プレースホルダー 4">
             <a:extLst>
               <a:ext uri="{FF2B5EF4-FFF2-40B4-BE49-F238E27FC236}">
-                <a16:creationId xmlns:a16="http://schemas.microsoft.com/office/drawing/2014/main" id="{D8E35684-AC46-B20D-0CE9-AF4191AA988E}"/>
+                <a16:creationId xmlns:a16="http://schemas.microsoft.com/office/drawing/2014/main" id="{C8BF3420-889A-2A41-3079-0E760D9B06F8}"/>
               </a:ext>
             </a:extLst>
           </p:cNvPr>
@@ -2232,7 +2232,7 @@
           <a:bodyPr/>
           <a:lstStyle/>
           <a:p>
-            <a:fld id="{C84D4F1C-EB9F-42DA-B81F-4AB702C4DBAC}" type="slidenum">
+            <a:fld id="{CD496522-D5C6-4211-A6D3-1A385CA55376}" type="slidenum">
               <a:rPr kumimoji="1" lang="ja-JP" altLang="en-US" smtClean="0"/>
               <a:t>‹#›</a:t>
             </a:fld>
@@ -2243,7 +2243,7 @@
     </p:spTree>
     <p:extLst>
       <p:ext uri="{BB962C8B-B14F-4D97-AF65-F5344CB8AC3E}">
-        <p14:creationId xmlns:p14="http://schemas.microsoft.com/office/powerpoint/2010/main" val="2454279980"/>
+        <p14:creationId xmlns:p14="http://schemas.microsoft.com/office/powerpoint/2010/main" val="2318943392"/>
       </p:ext>
     </p:extLst>
   </p:cSld>
@@ -2275,7 +2275,7 @@
           <p:cNvPr id="2" name="日付プレースホルダー 1">
             <a:extLst>
               <a:ext uri="{FF2B5EF4-FFF2-40B4-BE49-F238E27FC236}">
-                <a16:creationId xmlns:a16="http://schemas.microsoft.com/office/drawing/2014/main" id="{5BADD9EE-B8B9-4BEC-BF32-2B9986AF191C}"/>
+                <a16:creationId xmlns:a16="http://schemas.microsoft.com/office/drawing/2014/main" id="{E5A1F864-3902-5903-47FF-44DD08FAA2F3}"/>
               </a:ext>
             </a:extLst>
           </p:cNvPr>
@@ -2291,7 +2291,7 @@
           <a:bodyPr/>
           <a:lstStyle/>
           <a:p>
-            <a:fld id="{5B1B3A5F-9029-4640-8A8B-5D70370AC298}" type="datetimeFigureOut">
+            <a:fld id="{CD365D9F-C650-4687-9C48-466A67CDEA81}" type="datetimeFigureOut">
               <a:rPr kumimoji="1" lang="ja-JP" altLang="en-US" smtClean="0"/>
               <a:t>2026/7/30</a:t>
             </a:fld>
@@ -2304,7 +2304,7 @@
           <p:cNvPr id="3" name="フッター プレースホルダー 2">
             <a:extLst>
               <a:ext uri="{FF2B5EF4-FFF2-40B4-BE49-F238E27FC236}">
-                <a16:creationId xmlns:a16="http://schemas.microsoft.com/office/drawing/2014/main" id="{49220FBA-C722-E49E-D9A1-D1C1BE94B444}"/>
+                <a16:creationId xmlns:a16="http://schemas.microsoft.com/office/drawing/2014/main" id="{04FFC31F-C809-A7A4-58A5-1D008AC932F0}"/>
               </a:ext>
             </a:extLst>
           </p:cNvPr>
@@ -2329,7 +2329,7 @@
           <p:cNvPr id="4" name="スライド番号プレースホルダー 3">
             <a:extLst>
               <a:ext uri="{FF2B5EF4-FFF2-40B4-BE49-F238E27FC236}">
-                <a16:creationId xmlns:a16="http://schemas.microsoft.com/office/drawing/2014/main" id="{231FF380-BA95-CB7C-0113-DE9755CF9F43}"/>
+                <a16:creationId xmlns:a16="http://schemas.microsoft.com/office/drawing/2014/main" id="{3DD39FFC-FCB7-8793-C47F-3E95F072F687}"/>
               </a:ext>
             </a:extLst>
           </p:cNvPr>
@@ -2345,7 +2345,7 @@
           <a:bodyPr/>
           <a:lstStyle/>
           <a:p>
-            <a:fld id="{C84D4F1C-EB9F-42DA-B81F-4AB702C4DBAC}" type="slidenum">
+            <a:fld id="{CD496522-D5C6-4211-A6D3-1A385CA55376}" type="slidenum">
               <a:rPr kumimoji="1" lang="ja-JP" altLang="en-US" smtClean="0"/>
               <a:t>‹#›</a:t>
             </a:fld>
@@ -2356,7 +2356,7 @@
     </p:spTree>
     <p:extLst>
       <p:ext uri="{BB962C8B-B14F-4D97-AF65-F5344CB8AC3E}">
-        <p14:creationId xmlns:p14="http://schemas.microsoft.com/office/powerpoint/2010/main" val="3734486846"/>
+        <p14:creationId xmlns:p14="http://schemas.microsoft.com/office/powerpoint/2010/main" val="407543014"/>
       </p:ext>
     </p:extLst>
   </p:cSld>
@@ -2388,7 +2388,7 @@
           <p:cNvPr id="2" name="タイトル 1">
             <a:extLst>
               <a:ext uri="{FF2B5EF4-FFF2-40B4-BE49-F238E27FC236}">
-                <a16:creationId xmlns:a16="http://schemas.microsoft.com/office/drawing/2014/main" id="{B8B89155-5155-7CCF-67E9-3C181A86F573}"/>
+                <a16:creationId xmlns:a16="http://schemas.microsoft.com/office/drawing/2014/main" id="{9D0FE3CC-151E-0D04-4B21-E050390A0081}"/>
               </a:ext>
             </a:extLst>
           </p:cNvPr>
@@ -2425,7 +2425,7 @@
           <p:cNvPr id="3" name="コンテンツ プレースホルダー 2">
             <a:extLst>
               <a:ext uri="{FF2B5EF4-FFF2-40B4-BE49-F238E27FC236}">
-                <a16:creationId xmlns:a16="http://schemas.microsoft.com/office/drawing/2014/main" id="{A1DF56FB-9F6B-06A0-7045-57AD6EF4C609}"/>
+                <a16:creationId xmlns:a16="http://schemas.microsoft.com/office/drawing/2014/main" id="{9CD4A09A-5623-B57E-32C2-361817520684}"/>
               </a:ext>
             </a:extLst>
           </p:cNvPr>
@@ -2547,7 +2547,7 @@
           <p:cNvPr id="4" name="テキスト プレースホルダー 3">
             <a:extLst>
               <a:ext uri="{FF2B5EF4-FFF2-40B4-BE49-F238E27FC236}">
-                <a16:creationId xmlns:a16="http://schemas.microsoft.com/office/drawing/2014/main" id="{97FB3355-2F05-6F10-1A69-E6F955D936DD}"/>
+                <a16:creationId xmlns:a16="http://schemas.microsoft.com/office/drawing/2014/main" id="{2244FCD7-99A8-5742-A3B2-272A41885D2B}"/>
               </a:ext>
             </a:extLst>
           </p:cNvPr>
@@ -2618,7 +2618,7 @@
           <p:cNvPr id="5" name="日付プレースホルダー 4">
             <a:extLst>
               <a:ext uri="{FF2B5EF4-FFF2-40B4-BE49-F238E27FC236}">
-                <a16:creationId xmlns:a16="http://schemas.microsoft.com/office/drawing/2014/main" id="{FE42574C-D5F0-837C-D261-6E3D9533D701}"/>
+                <a16:creationId xmlns:a16="http://schemas.microsoft.com/office/drawing/2014/main" id="{DA911EEB-A5D4-95FF-1A07-C8D263316589}"/>
               </a:ext>
             </a:extLst>
           </p:cNvPr>
@@ -2634,7 +2634,7 @@
           <a:bodyPr/>
           <a:lstStyle/>
           <a:p>
-            <a:fld id="{5B1B3A5F-9029-4640-8A8B-5D70370AC298}" type="datetimeFigureOut">
+            <a:fld id="{CD365D9F-C650-4687-9C48-466A67CDEA81}" type="datetimeFigureOut">
               <a:rPr kumimoji="1" lang="ja-JP" altLang="en-US" smtClean="0"/>
               <a:t>2026/7/30</a:t>
             </a:fld>
@@ -2647,7 +2647,7 @@
           <p:cNvPr id="6" name="フッター プレースホルダー 5">
             <a:extLst>
               <a:ext uri="{FF2B5EF4-FFF2-40B4-BE49-F238E27FC236}">
-                <a16:creationId xmlns:a16="http://schemas.microsoft.com/office/drawing/2014/main" id="{3F429DBD-2946-A4C5-8AAB-C3C1243C1FFE}"/>
+                <a16:creationId xmlns:a16="http://schemas.microsoft.com/office/drawing/2014/main" id="{1343A3C3-C4EC-F1E2-79F3-1B0AFB44A147}"/>
               </a:ext>
             </a:extLst>
           </p:cNvPr>
@@ -2672,7 +2672,7 @@
           <p:cNvPr id="7" name="スライド番号プレースホルダー 6">
             <a:extLst>
               <a:ext uri="{FF2B5EF4-FFF2-40B4-BE49-F238E27FC236}">
-                <a16:creationId xmlns:a16="http://schemas.microsoft.com/office/drawing/2014/main" id="{59132D59-2B10-021D-FC17-DFC87C8B9475}"/>
+                <a16:creationId xmlns:a16="http://schemas.microsoft.com/office/drawing/2014/main" id="{4BCE0CA3-D28E-CA6F-ABBE-99635EDC0A6D}"/>
               </a:ext>
             </a:extLst>
           </p:cNvPr>
@@ -2688,7 +2688,7 @@
           <a:bodyPr/>
           <a:lstStyle/>
           <a:p>
-            <a:fld id="{C84D4F1C-EB9F-42DA-B81F-4AB702C4DBAC}" type="slidenum">
+            <a:fld id="{CD496522-D5C6-4211-A6D3-1A385CA55376}" type="slidenum">
               <a:rPr kumimoji="1" lang="ja-JP" altLang="en-US" smtClean="0"/>
               <a:t>‹#›</a:t>
             </a:fld>
@@ -2699,7 +2699,7 @@
     </p:spTree>
     <p:extLst>
       <p:ext uri="{BB962C8B-B14F-4D97-AF65-F5344CB8AC3E}">
-        <p14:creationId xmlns:p14="http://schemas.microsoft.com/office/powerpoint/2010/main" val="3414810196"/>
+        <p14:creationId xmlns:p14="http://schemas.microsoft.com/office/powerpoint/2010/main" val="2319086104"/>
       </p:ext>
     </p:extLst>
   </p:cSld>
@@ -2731,7 +2731,7 @@
           <p:cNvPr id="2" name="タイトル 1">
             <a:extLst>
               <a:ext uri="{FF2B5EF4-FFF2-40B4-BE49-F238E27FC236}">
-                <a16:creationId xmlns:a16="http://schemas.microsoft.com/office/drawing/2014/main" id="{E8EE0D58-DAC1-B1A0-E9C6-D80F9AB7D5A3}"/>
+                <a16:creationId xmlns:a16="http://schemas.microsoft.com/office/drawing/2014/main" id="{4E57B8D4-B9C4-34E8-38A2-57A63FB13CFA}"/>
               </a:ext>
             </a:extLst>
           </p:cNvPr>
@@ -2768,7 +2768,7 @@
           <p:cNvPr id="3" name="図プレースホルダー 2">
             <a:extLst>
               <a:ext uri="{FF2B5EF4-FFF2-40B4-BE49-F238E27FC236}">
-                <a16:creationId xmlns:a16="http://schemas.microsoft.com/office/drawing/2014/main" id="{A6C94C4B-03A7-D38A-49A5-9D5061D46FA5}"/>
+                <a16:creationId xmlns:a16="http://schemas.microsoft.com/office/drawing/2014/main" id="{6C35BD47-10A6-D6CB-95A1-22A544CF4A75}"/>
               </a:ext>
             </a:extLst>
           </p:cNvPr>
@@ -2835,7 +2835,7 @@
           <p:cNvPr id="4" name="テキスト プレースホルダー 3">
             <a:extLst>
               <a:ext uri="{FF2B5EF4-FFF2-40B4-BE49-F238E27FC236}">
-                <a16:creationId xmlns:a16="http://schemas.microsoft.com/office/drawing/2014/main" id="{96E001C8-FDCF-EE52-E18C-7043A30F715F}"/>
+                <a16:creationId xmlns:a16="http://schemas.microsoft.com/office/drawing/2014/main" id="{8A2CBF62-8721-C420-F3F5-9CD84F940FD1}"/>
               </a:ext>
             </a:extLst>
           </p:cNvPr>
@@ -2906,7 +2906,7 @@
           <p:cNvPr id="5" name="日付プレースホルダー 4">
             <a:extLst>
               <a:ext uri="{FF2B5EF4-FFF2-40B4-BE49-F238E27FC236}">
-                <a16:creationId xmlns:a16="http://schemas.microsoft.com/office/drawing/2014/main" id="{0104830A-9F19-E3C4-7668-D2DA57185309}"/>
+                <a16:creationId xmlns:a16="http://schemas.microsoft.com/office/drawing/2014/main" id="{4F2F63DE-73FB-E2F6-3FBA-617137FE3694}"/>
               </a:ext>
             </a:extLst>
           </p:cNvPr>
@@ -2922,7 +2922,7 @@
           <a:bodyPr/>
           <a:lstStyle/>
           <a:p>
-            <a:fld id="{5B1B3A5F-9029-4640-8A8B-5D70370AC298}" type="datetimeFigureOut">
+            <a:fld id="{CD365D9F-C650-4687-9C48-466A67CDEA81}" type="datetimeFigureOut">
               <a:rPr kumimoji="1" lang="ja-JP" altLang="en-US" smtClean="0"/>
               <a:t>2026/7/30</a:t>
             </a:fld>
@@ -2935,7 +2935,7 @@
           <p:cNvPr id="6" name="フッター プレースホルダー 5">
             <a:extLst>
               <a:ext uri="{FF2B5EF4-FFF2-40B4-BE49-F238E27FC236}">
-                <a16:creationId xmlns:a16="http://schemas.microsoft.com/office/drawing/2014/main" id="{3E9A523D-7E0D-134F-DAED-DDBB01C8EEBF}"/>
+                <a16:creationId xmlns:a16="http://schemas.microsoft.com/office/drawing/2014/main" id="{FD37C50C-9C2B-753C-F723-E44E69C89552}"/>
               </a:ext>
             </a:extLst>
           </p:cNvPr>
@@ -2960,7 +2960,7 @@
           <p:cNvPr id="7" name="スライド番号プレースホルダー 6">
             <a:extLst>
               <a:ext uri="{FF2B5EF4-FFF2-40B4-BE49-F238E27FC236}">
-                <a16:creationId xmlns:a16="http://schemas.microsoft.com/office/drawing/2014/main" id="{4D633625-C6E3-9A83-669B-D746769FC818}"/>
+                <a16:creationId xmlns:a16="http://schemas.microsoft.com/office/drawing/2014/main" id="{1E6BF632-D22E-4DC9-5BEC-C211C0D1B52C}"/>
               </a:ext>
             </a:extLst>
           </p:cNvPr>
@@ -2976,7 +2976,7 @@
           <a:bodyPr/>
           <a:lstStyle/>
           <a:p>
-            <a:fld id="{C84D4F1C-EB9F-42DA-B81F-4AB702C4DBAC}" type="slidenum">
+            <a:fld id="{CD496522-D5C6-4211-A6D3-1A385CA55376}" type="slidenum">
               <a:rPr kumimoji="1" lang="ja-JP" altLang="en-US" smtClean="0"/>
               <a:t>‹#›</a:t>
             </a:fld>
@@ -2987,7 +2987,7 @@
     </p:spTree>
     <p:extLst>
       <p:ext uri="{BB962C8B-B14F-4D97-AF65-F5344CB8AC3E}">
-        <p14:creationId xmlns:p14="http://schemas.microsoft.com/office/powerpoint/2010/main" val="2051046829"/>
+        <p14:creationId xmlns:p14="http://schemas.microsoft.com/office/powerpoint/2010/main" val="3732804848"/>
       </p:ext>
     </p:extLst>
   </p:cSld>
@@ -3024,7 +3024,7 @@
           <p:cNvPr id="2" name="タイトル プレースホルダー 1">
             <a:extLst>
               <a:ext uri="{FF2B5EF4-FFF2-40B4-BE49-F238E27FC236}">
-                <a16:creationId xmlns:a16="http://schemas.microsoft.com/office/drawing/2014/main" id="{B3FD4E4F-A853-F871-3FFC-135DD8E9BA76}"/>
+                <a16:creationId xmlns:a16="http://schemas.microsoft.com/office/drawing/2014/main" id="{24DB7F58-79C4-B943-372F-22D195D2C921}"/>
               </a:ext>
             </a:extLst>
           </p:cNvPr>
@@ -3062,7 +3062,7 @@
           <p:cNvPr id="3" name="テキスト プレースホルダー 2">
             <a:extLst>
               <a:ext uri="{FF2B5EF4-FFF2-40B4-BE49-F238E27FC236}">
-                <a16:creationId xmlns:a16="http://schemas.microsoft.com/office/drawing/2014/main" id="{CA509C5B-D411-B64E-765D-2A97C9F4282A}"/>
+                <a16:creationId xmlns:a16="http://schemas.microsoft.com/office/drawing/2014/main" id="{14C0DA1A-2B02-9D85-5F3B-FA802C77187E}"/>
               </a:ext>
             </a:extLst>
           </p:cNvPr>
@@ -3161,7 +3161,7 @@
           <p:cNvPr id="4" name="日付プレースホルダー 3">
             <a:extLst>
               <a:ext uri="{FF2B5EF4-FFF2-40B4-BE49-F238E27FC236}">
-                <a16:creationId xmlns:a16="http://schemas.microsoft.com/office/drawing/2014/main" id="{7CAFF8E0-EEDC-FB65-0F40-5BE5FD49B092}"/>
+                <a16:creationId xmlns:a16="http://schemas.microsoft.com/office/drawing/2014/main" id="{48F2EB1F-65CD-639F-A50F-F92057EB7F23}"/>
               </a:ext>
             </a:extLst>
           </p:cNvPr>
@@ -3195,7 +3195,7 @@
             </a:lvl1pPr>
           </a:lstStyle>
           <a:p>
-            <a:fld id="{5B1B3A5F-9029-4640-8A8B-5D70370AC298}" type="datetimeFigureOut">
+            <a:fld id="{CD365D9F-C650-4687-9C48-466A67CDEA81}" type="datetimeFigureOut">
               <a:rPr kumimoji="1" lang="ja-JP" altLang="en-US" smtClean="0"/>
               <a:t>2026/7/30</a:t>
             </a:fld>
@@ -3208,7 +3208,7 @@
           <p:cNvPr id="5" name="フッター プレースホルダー 4">
             <a:extLst>
               <a:ext uri="{FF2B5EF4-FFF2-40B4-BE49-F238E27FC236}">
-                <a16:creationId xmlns:a16="http://schemas.microsoft.com/office/drawing/2014/main" id="{44CC4D12-11D1-8E1F-2A94-96B6F1DB590F}"/>
+                <a16:creationId xmlns:a16="http://schemas.microsoft.com/office/drawing/2014/main" id="{E62A4AA3-95A1-B092-9099-495228F21CD3}"/>
               </a:ext>
             </a:extLst>
           </p:cNvPr>
@@ -3251,7 +3251,7 @@
           <p:cNvPr id="6" name="スライド番号プレースホルダー 5">
             <a:extLst>
               <a:ext uri="{FF2B5EF4-FFF2-40B4-BE49-F238E27FC236}">
-                <a16:creationId xmlns:a16="http://schemas.microsoft.com/office/drawing/2014/main" id="{69E58311-9FD7-B478-0586-BE49DCDA84B4}"/>
+                <a16:creationId xmlns:a16="http://schemas.microsoft.com/office/drawing/2014/main" id="{9BC64481-0EF6-6CBE-8528-8802B140416C}"/>
               </a:ext>
             </a:extLst>
           </p:cNvPr>
@@ -3285,7 +3285,7 @@
             </a:lvl1pPr>
           </a:lstStyle>
           <a:p>
-            <a:fld id="{C84D4F1C-EB9F-42DA-B81F-4AB702C4DBAC}" type="slidenum">
+            <a:fld id="{CD496522-D5C6-4211-A6D3-1A385CA55376}" type="slidenum">
               <a:rPr kumimoji="1" lang="ja-JP" altLang="en-US" smtClean="0"/>
               <a:t>‹#›</a:t>
             </a:fld>
@@ -3296,7 +3296,7 @@
     </p:spTree>
     <p:extLst>
       <p:ext uri="{BB962C8B-B14F-4D97-AF65-F5344CB8AC3E}">
-        <p14:creationId xmlns:p14="http://schemas.microsoft.com/office/powerpoint/2010/main" val="4208517312"/>
+        <p14:creationId xmlns:p14="http://schemas.microsoft.com/office/powerpoint/2010/main" val="3113884292"/>
       </p:ext>
     </p:extLst>
   </p:cSld>
@@ -3619,7 +3619,7 @@
           <p:cNvPr id="2" name="テキスト ボックス 1">
             <a:extLst>
               <a:ext uri="{FF2B5EF4-FFF2-40B4-BE49-F238E27FC236}">
-                <a16:creationId xmlns:a16="http://schemas.microsoft.com/office/drawing/2014/main" id="{EA02BAD5-F108-625D-1135-5AB0842118A3}"/>
+                <a16:creationId xmlns:a16="http://schemas.microsoft.com/office/drawing/2014/main" id="{A5D30837-5AC2-5E17-23FF-F6FF07513E2C}"/>
               </a:ext>
             </a:extLst>
           </p:cNvPr>
@@ -3665,7 +3665,7 @@
           <p:cNvPr id="3" name="テキスト ボックス 2">
             <a:extLst>
               <a:ext uri="{FF2B5EF4-FFF2-40B4-BE49-F238E27FC236}">
-                <a16:creationId xmlns:a16="http://schemas.microsoft.com/office/drawing/2014/main" id="{1DEB9F46-A4F6-EFC4-B949-D340CEE8A188}"/>
+                <a16:creationId xmlns:a16="http://schemas.microsoft.com/office/drawing/2014/main" id="{67F1D7D9-5F92-11D1-B720-53389EA9190A}"/>
               </a:ext>
             </a:extLst>
           </p:cNvPr>
@@ -3714,7 +3714,7 @@
           <p:cNvPr id="4" name="テキスト ボックス 3">
             <a:extLst>
               <a:ext uri="{FF2B5EF4-FFF2-40B4-BE49-F238E27FC236}">
-                <a16:creationId xmlns:a16="http://schemas.microsoft.com/office/drawing/2014/main" id="{809A1723-CFB9-DF6F-5E7A-1819F6129AD8}"/>
+                <a16:creationId xmlns:a16="http://schemas.microsoft.com/office/drawing/2014/main" id="{40C3D873-27DC-BC83-806C-12D5FAE36E6F}"/>
               </a:ext>
             </a:extLst>
           </p:cNvPr>
@@ -3754,7 +3754,7 @@
           <p:cNvPr id="5" name="テキスト ボックス 4">
             <a:extLst>
               <a:ext uri="{FF2B5EF4-FFF2-40B4-BE49-F238E27FC236}">
-                <a16:creationId xmlns:a16="http://schemas.microsoft.com/office/drawing/2014/main" id="{8F034EBF-33E2-9D09-EB55-9662DB86885C}"/>
+                <a16:creationId xmlns:a16="http://schemas.microsoft.com/office/drawing/2014/main" id="{1A82A147-B808-43A6-88F0-75C27D042675}"/>
               </a:ext>
             </a:extLst>
           </p:cNvPr>
@@ -3801,7 +3801,7 @@
             <a:hlinkClick r:id="" action="ppaction://media"/>
             <a:extLst>
               <a:ext uri="{FF2B5EF4-FFF2-40B4-BE49-F238E27FC236}">
-                <a16:creationId xmlns:a16="http://schemas.microsoft.com/office/drawing/2014/main" id="{75ADE735-0F36-5A60-8F13-AA64C1F91865}"/>
+                <a16:creationId xmlns:a16="http://schemas.microsoft.com/office/drawing/2014/main" id="{A7123A91-ADBC-68A0-0E94-3107B4521398}"/>
               </a:ext>
             </a:extLst>
           </p:cNvPr>
@@ -3836,7 +3836,7 @@
     </p:spTree>
     <p:extLst>
       <p:ext uri="{BB962C8B-B14F-4D97-AF65-F5344CB8AC3E}">
-        <p14:creationId xmlns:p14="http://schemas.microsoft.com/office/powerpoint/2010/main" val="3902078071"/>
+        <p14:creationId xmlns:p14="http://schemas.microsoft.com/office/powerpoint/2010/main" val="2447138643"/>
       </p:ext>
     </p:extLst>
   </p:cSld>
@@ -3960,7 +3960,7 @@
           <p:cNvPr id="2" name="テキスト ボックス 1">
             <a:extLst>
               <a:ext uri="{FF2B5EF4-FFF2-40B4-BE49-F238E27FC236}">
-                <a16:creationId xmlns:a16="http://schemas.microsoft.com/office/drawing/2014/main" id="{92111707-E8A6-4BB9-426A-46403DE938DF}"/>
+                <a16:creationId xmlns:a16="http://schemas.microsoft.com/office/drawing/2014/main" id="{53712ED7-B0F4-00F3-25E7-ACAEC5F08455}"/>
               </a:ext>
             </a:extLst>
           </p:cNvPr>
@@ -4006,7 +4006,7 @@
           <p:cNvPr id="3" name="テキスト ボックス 2">
             <a:extLst>
               <a:ext uri="{FF2B5EF4-FFF2-40B4-BE49-F238E27FC236}">
-                <a16:creationId xmlns:a16="http://schemas.microsoft.com/office/drawing/2014/main" id="{A4C2F8D5-1904-3AF0-6B56-4A567AB634EE}"/>
+                <a16:creationId xmlns:a16="http://schemas.microsoft.com/office/drawing/2014/main" id="{85FF4D06-F621-AB9F-A04C-01D64B59F42B}"/>
               </a:ext>
             </a:extLst>
           </p:cNvPr>
@@ -4046,7 +4046,7 @@
           <p:cNvPr id="4" name="テキスト ボックス 3">
             <a:extLst>
               <a:ext uri="{FF2B5EF4-FFF2-40B4-BE49-F238E27FC236}">
-                <a16:creationId xmlns:a16="http://schemas.microsoft.com/office/drawing/2014/main" id="{F2974FCF-8313-4CA8-90B1-DDE33A2F327A}"/>
+                <a16:creationId xmlns:a16="http://schemas.microsoft.com/office/drawing/2014/main" id="{B5BA7BDD-D05E-55AD-A41B-202A878298A3}"/>
               </a:ext>
             </a:extLst>
           </p:cNvPr>
@@ -4095,7 +4095,7 @@
           <p:cNvPr id="5" name="テキスト ボックス 4">
             <a:extLst>
               <a:ext uri="{FF2B5EF4-FFF2-40B4-BE49-F238E27FC236}">
-                <a16:creationId xmlns:a16="http://schemas.microsoft.com/office/drawing/2014/main" id="{2B92EC68-F32C-9A87-E12A-B69ECF864A70}"/>
+                <a16:creationId xmlns:a16="http://schemas.microsoft.com/office/drawing/2014/main" id="{2118B662-F67D-8C31-4454-41E5B628D698}"/>
               </a:ext>
             </a:extLst>
           </p:cNvPr>
@@ -4142,7 +4142,7 @@
             <a:hlinkClick r:id="" action="ppaction://media"/>
             <a:extLst>
               <a:ext uri="{FF2B5EF4-FFF2-40B4-BE49-F238E27FC236}">
-                <a16:creationId xmlns:a16="http://schemas.microsoft.com/office/drawing/2014/main" id="{85613EC3-BC53-E3A6-38EC-72F3DFEAC941}"/>
+                <a16:creationId xmlns:a16="http://schemas.microsoft.com/office/drawing/2014/main" id="{F490DCAD-2ADA-7A86-A794-C5A75C316010}"/>
               </a:ext>
             </a:extLst>
           </p:cNvPr>
@@ -4177,7 +4177,7 @@
     </p:spTree>
     <p:extLst>
       <p:ext uri="{BB962C8B-B14F-4D97-AF65-F5344CB8AC3E}">
-        <p14:creationId xmlns:p14="http://schemas.microsoft.com/office/powerpoint/2010/main" val="2077641876"/>
+        <p14:creationId xmlns:p14="http://schemas.microsoft.com/office/powerpoint/2010/main" val="1643427255"/>
       </p:ext>
     </p:extLst>
   </p:cSld>
@@ -4301,7 +4301,7 @@
           <p:cNvPr id="2" name="テキスト ボックス 1">
             <a:extLst>
               <a:ext uri="{FF2B5EF4-FFF2-40B4-BE49-F238E27FC236}">
-                <a16:creationId xmlns:a16="http://schemas.microsoft.com/office/drawing/2014/main" id="{DADE88B5-BA1B-4433-C251-2CC13AB67124}"/>
+                <a16:creationId xmlns:a16="http://schemas.microsoft.com/office/drawing/2014/main" id="{50D1AC7E-E9F7-4982-A564-00B1145E001A}"/>
               </a:ext>
             </a:extLst>
           </p:cNvPr>
@@ -4347,7 +4347,7 @@
           <p:cNvPr id="3" name="テキスト ボックス 2">
             <a:extLst>
               <a:ext uri="{FF2B5EF4-FFF2-40B4-BE49-F238E27FC236}">
-                <a16:creationId xmlns:a16="http://schemas.microsoft.com/office/drawing/2014/main" id="{10267AE2-4E9C-3B11-5B08-958AFCE8DF06}"/>
+                <a16:creationId xmlns:a16="http://schemas.microsoft.com/office/drawing/2014/main" id="{8E42EEBF-6B48-057E-C066-A3C2D2AD9914}"/>
               </a:ext>
             </a:extLst>
           </p:cNvPr>
@@ -4387,7 +4387,7 @@
           <p:cNvPr id="4" name="テキスト ボックス 3">
             <a:extLst>
               <a:ext uri="{FF2B5EF4-FFF2-40B4-BE49-F238E27FC236}">
-                <a16:creationId xmlns:a16="http://schemas.microsoft.com/office/drawing/2014/main" id="{67420904-C372-9E41-F575-1D0C4190A544}"/>
+                <a16:creationId xmlns:a16="http://schemas.microsoft.com/office/drawing/2014/main" id="{ACBD0C14-2626-1193-3C72-4EB989439C97}"/>
               </a:ext>
             </a:extLst>
           </p:cNvPr>
@@ -4428,7 +4428,7 @@
           <p:cNvPr id="5" name="テキスト ボックス 4">
             <a:extLst>
               <a:ext uri="{FF2B5EF4-FFF2-40B4-BE49-F238E27FC236}">
-                <a16:creationId xmlns:a16="http://schemas.microsoft.com/office/drawing/2014/main" id="{C9D45C84-3871-0931-5ACF-BC41BCE3E091}"/>
+                <a16:creationId xmlns:a16="http://schemas.microsoft.com/office/drawing/2014/main" id="{358082F2-47F7-2843-983C-3208CDEF4F4C}"/>
               </a:ext>
             </a:extLst>
           </p:cNvPr>
@@ -4475,7 +4475,7 @@
             <a:hlinkClick r:id="" action="ppaction://media"/>
             <a:extLst>
               <a:ext uri="{FF2B5EF4-FFF2-40B4-BE49-F238E27FC236}">
-                <a16:creationId xmlns:a16="http://schemas.microsoft.com/office/drawing/2014/main" id="{B27E0886-F2B7-5835-784B-2796F657582B}"/>
+                <a16:creationId xmlns:a16="http://schemas.microsoft.com/office/drawing/2014/main" id="{34CCE4BD-D440-C413-F87A-C1225B02B520}"/>
               </a:ext>
             </a:extLst>
           </p:cNvPr>
@@ -4510,7 +4510,7 @@
     </p:spTree>
     <p:extLst>
       <p:ext uri="{BB962C8B-B14F-4D97-AF65-F5344CB8AC3E}">
-        <p14:creationId xmlns:p14="http://schemas.microsoft.com/office/powerpoint/2010/main" val="2772678444"/>
+        <p14:creationId xmlns:p14="http://schemas.microsoft.com/office/powerpoint/2010/main" val="1639220432"/>
       </p:ext>
     </p:extLst>
   </p:cSld>
@@ -4634,7 +4634,7 @@
           <p:cNvPr id="2" name="テキスト ボックス 1">
             <a:extLst>
               <a:ext uri="{FF2B5EF4-FFF2-40B4-BE49-F238E27FC236}">
-                <a16:creationId xmlns:a16="http://schemas.microsoft.com/office/drawing/2014/main" id="{C4BEF7B1-1A99-32E1-2DE0-1BA61E3AB5AF}"/>
+                <a16:creationId xmlns:a16="http://schemas.microsoft.com/office/drawing/2014/main" id="{D2A00ED5-F337-F40B-14D9-1D1588A15A54}"/>
               </a:ext>
             </a:extLst>
           </p:cNvPr>
@@ -4680,7 +4680,7 @@
           <p:cNvPr id="3" name="テキスト ボックス 2">
             <a:extLst>
               <a:ext uri="{FF2B5EF4-FFF2-40B4-BE49-F238E27FC236}">
-                <a16:creationId xmlns:a16="http://schemas.microsoft.com/office/drawing/2014/main" id="{F38145D3-2C28-59E8-CEC7-96ED0F550417}"/>
+                <a16:creationId xmlns:a16="http://schemas.microsoft.com/office/drawing/2014/main" id="{082A2ABA-3D51-2636-30E7-973802C23C50}"/>
               </a:ext>
             </a:extLst>
           </p:cNvPr>
@@ -4720,7 +4720,7 @@
           <p:cNvPr id="4" name="テキスト ボックス 3">
             <a:extLst>
               <a:ext uri="{FF2B5EF4-FFF2-40B4-BE49-F238E27FC236}">
-                <a16:creationId xmlns:a16="http://schemas.microsoft.com/office/drawing/2014/main" id="{85957395-7730-ABA1-D0D4-89246497FEC5}"/>
+                <a16:creationId xmlns:a16="http://schemas.microsoft.com/office/drawing/2014/main" id="{CEEAD432-2F19-93C7-208D-61D2132F3D94}"/>
               </a:ext>
             </a:extLst>
           </p:cNvPr>
@@ -4779,7 +4779,7 @@
           <p:cNvPr id="5" name="テキスト ボックス 4">
             <a:extLst>
               <a:ext uri="{FF2B5EF4-FFF2-40B4-BE49-F238E27FC236}">
-                <a16:creationId xmlns:a16="http://schemas.microsoft.com/office/drawing/2014/main" id="{712B7174-55F5-7966-0D3E-E9B173E3AAC2}"/>
+                <a16:creationId xmlns:a16="http://schemas.microsoft.com/office/drawing/2014/main" id="{37B73B9F-D659-52B1-8C3E-DA86F6E50AAF}"/>
               </a:ext>
             </a:extLst>
           </p:cNvPr>
@@ -4826,7 +4826,7 @@
             <a:hlinkClick r:id="" action="ppaction://media"/>
             <a:extLst>
               <a:ext uri="{FF2B5EF4-FFF2-40B4-BE49-F238E27FC236}">
-                <a16:creationId xmlns:a16="http://schemas.microsoft.com/office/drawing/2014/main" id="{EF8E1CCA-205B-D527-8563-2BADE542DFD0}"/>
+                <a16:creationId xmlns:a16="http://schemas.microsoft.com/office/drawing/2014/main" id="{6DB01BE6-B8EF-AA43-7421-D2CDB4CABBDD}"/>
               </a:ext>
             </a:extLst>
           </p:cNvPr>
@@ -4861,7 +4861,7 @@
     </p:spTree>
     <p:extLst>
       <p:ext uri="{BB962C8B-B14F-4D97-AF65-F5344CB8AC3E}">
-        <p14:creationId xmlns:p14="http://schemas.microsoft.com/office/powerpoint/2010/main" val="3456328885"/>
+        <p14:creationId xmlns:p14="http://schemas.microsoft.com/office/powerpoint/2010/main" val="2945996602"/>
       </p:ext>
     </p:extLst>
   </p:cSld>
@@ -4985,7 +4985,7 @@
           <p:cNvPr id="2" name="テキスト ボックス 1">
             <a:extLst>
               <a:ext uri="{FF2B5EF4-FFF2-40B4-BE49-F238E27FC236}">
-                <a16:creationId xmlns:a16="http://schemas.microsoft.com/office/drawing/2014/main" id="{C3DF8884-4527-AE3A-4F13-2D5852A71F17}"/>
+                <a16:creationId xmlns:a16="http://schemas.microsoft.com/office/drawing/2014/main" id="{B44FB736-9F7A-A647-FEFC-AF83502930B2}"/>
               </a:ext>
             </a:extLst>
           </p:cNvPr>
@@ -5031,7 +5031,7 @@
           <p:cNvPr id="3" name="テキスト ボックス 2">
             <a:extLst>
               <a:ext uri="{FF2B5EF4-FFF2-40B4-BE49-F238E27FC236}">
-                <a16:creationId xmlns:a16="http://schemas.microsoft.com/office/drawing/2014/main" id="{CF3C0ABA-662E-DCA5-97C7-F14A2DB97AEA}"/>
+                <a16:creationId xmlns:a16="http://schemas.microsoft.com/office/drawing/2014/main" id="{266B4DF5-2D3A-472B-9C77-1F93A9488141}"/>
               </a:ext>
             </a:extLst>
           </p:cNvPr>
@@ -5071,7 +5071,7 @@
           <p:cNvPr id="4" name="テキスト ボックス 3">
             <a:extLst>
               <a:ext uri="{FF2B5EF4-FFF2-40B4-BE49-F238E27FC236}">
-                <a16:creationId xmlns:a16="http://schemas.microsoft.com/office/drawing/2014/main" id="{BAC17CF7-AD52-19A4-7F83-6E3C9F288E1E}"/>
+                <a16:creationId xmlns:a16="http://schemas.microsoft.com/office/drawing/2014/main" id="{8E6E7992-1BD0-C9BB-9B54-A59BC9F3C716}"/>
               </a:ext>
             </a:extLst>
           </p:cNvPr>
@@ -5095,20 +5095,14 @@
           <a:lstStyle/>
           <a:p>
             <a:r>
-              <a:rPr kumimoji="1" lang="en-US" altLang="ja-JP" sz="2000">
+              <a:rPr kumimoji="1" lang="ja-JP" altLang="en-US" sz="2000">
                 <a:solidFill>
                   <a:srgbClr val="333333"/>
                 </a:solidFill>
                 <a:latin typeface="Arial" panose="020B0604020202020204" pitchFamily="34" charset="0"/>
               </a:rPr>
-              <a:t>Initialize repository</a:t>
-            </a:r>
-            <a:endParaRPr kumimoji="1" lang="ja-JP" altLang="en-US" sz="2000">
-              <a:solidFill>
-                <a:srgbClr val="333333"/>
-              </a:solidFill>
-              <a:latin typeface="Arial" panose="020B0604020202020204" pitchFamily="34" charset="0"/>
-            </a:endParaRPr>
+              <a:t>直近のコミットでは、プロジェクトの初期構成と開発基盤が整備されました。</a:t>
+            </a:r>
           </a:p>
         </p:txBody>
       </p:sp>
@@ -5117,7 +5111,7 @@
           <p:cNvPr id="5" name="テキスト ボックス 4">
             <a:extLst>
               <a:ext uri="{FF2B5EF4-FFF2-40B4-BE49-F238E27FC236}">
-                <a16:creationId xmlns:a16="http://schemas.microsoft.com/office/drawing/2014/main" id="{DAE55B94-4116-5C8F-ED46-4FC2D5E95FDE}"/>
+                <a16:creationId xmlns:a16="http://schemas.microsoft.com/office/drawing/2014/main" id="{EE3B4D3B-55DD-36A3-D0A6-B6AA42686237}"/>
               </a:ext>
             </a:extLst>
           </p:cNvPr>
@@ -5164,7 +5158,7 @@
             <a:hlinkClick r:id="" action="ppaction://media"/>
             <a:extLst>
               <a:ext uri="{FF2B5EF4-FFF2-40B4-BE49-F238E27FC236}">
-                <a16:creationId xmlns:a16="http://schemas.microsoft.com/office/drawing/2014/main" id="{C6EF11AF-313B-1133-54E0-91F471D81C81}"/>
+                <a16:creationId xmlns:a16="http://schemas.microsoft.com/office/drawing/2014/main" id="{78519282-AF67-2AD0-6263-2AE02B923658}"/>
               </a:ext>
             </a:extLst>
           </p:cNvPr>
@@ -5199,7 +5193,7 @@
     </p:spTree>
     <p:extLst>
       <p:ext uri="{BB962C8B-B14F-4D97-AF65-F5344CB8AC3E}">
-        <p14:creationId xmlns:p14="http://schemas.microsoft.com/office/powerpoint/2010/main" val="1361123883"/>
+        <p14:creationId xmlns:p14="http://schemas.microsoft.com/office/powerpoint/2010/main" val="2810413264"/>
       </p:ext>
     </p:extLst>
   </p:cSld>
@@ -5208,10 +5202,10 @@
   </p:clrMapOvr>
   <mc:AlternateContent xmlns:mc="http://schemas.openxmlformats.org/markup-compatibility/2006">
     <mc:Choice xmlns:p14="http://schemas.microsoft.com/office/powerpoint/2010/main" Requires="p14">
-      <p:transition spd="slow" p14:dur="2000" advTm="6000"/>
+      <p:transition spd="slow" p14:dur="2000" advTm="7000"/>
     </mc:Choice>
     <mc:Fallback>
-      <p:transition spd="slow" advTm="6000"/>
+      <p:transition spd="slow" advTm="7000"/>
     </mc:Fallback>
   </mc:AlternateContent>
   <p:timing>
@@ -5242,7 +5236,7 @@
                                   <p:childTnLst>
                                     <p:cmd type="call" cmd="playFrom(0.0)">
                                       <p:cBhvr>
-                                        <p:cTn id="6" dur="5687" fill="hold"/>
+                                        <p:cTn id="6" dur="6126" fill="hold"/>
                                         <p:tgtEl>
                                           <p:spTgt spid="6"/>
                                         </p:tgtEl>
@@ -5323,7 +5317,7 @@
           <p:cNvPr id="2" name="テキスト ボックス 1">
             <a:extLst>
               <a:ext uri="{FF2B5EF4-FFF2-40B4-BE49-F238E27FC236}">
-                <a16:creationId xmlns:a16="http://schemas.microsoft.com/office/drawing/2014/main" id="{18974BBD-3C7F-7D6F-92BD-92807BFB1AEF}"/>
+                <a16:creationId xmlns:a16="http://schemas.microsoft.com/office/drawing/2014/main" id="{96BCCF90-8522-1876-38A7-188DDA7A17DC}"/>
               </a:ext>
             </a:extLst>
           </p:cNvPr>
@@ -5369,7 +5363,7 @@
           <p:cNvPr id="3" name="テキスト ボックス 2">
             <a:extLst>
               <a:ext uri="{FF2B5EF4-FFF2-40B4-BE49-F238E27FC236}">
-                <a16:creationId xmlns:a16="http://schemas.microsoft.com/office/drawing/2014/main" id="{721BE37E-32E7-669E-4A22-DFD9626EAA6B}"/>
+                <a16:creationId xmlns:a16="http://schemas.microsoft.com/office/drawing/2014/main" id="{428610DB-DBC8-57ED-9D9D-D6B930F1C0F5}"/>
               </a:ext>
             </a:extLst>
           </p:cNvPr>
@@ -5409,7 +5403,7 @@
           <p:cNvPr id="4" name="テキスト ボックス 3">
             <a:extLst>
               <a:ext uri="{FF2B5EF4-FFF2-40B4-BE49-F238E27FC236}">
-                <a16:creationId xmlns:a16="http://schemas.microsoft.com/office/drawing/2014/main" id="{34BE88A9-D038-A7C2-513F-DB0280E94A35}"/>
+                <a16:creationId xmlns:a16="http://schemas.microsoft.com/office/drawing/2014/main" id="{11510276-23FD-D7C2-819B-84E61B37DD78}"/>
               </a:ext>
             </a:extLst>
           </p:cNvPr>
@@ -5474,7 +5468,7 @@
           <p:cNvPr id="5" name="テキスト ボックス 4">
             <a:extLst>
               <a:ext uri="{FF2B5EF4-FFF2-40B4-BE49-F238E27FC236}">
-                <a16:creationId xmlns:a16="http://schemas.microsoft.com/office/drawing/2014/main" id="{8A6D3530-9590-D19D-7BB4-E1EC1CD10503}"/>
+                <a16:creationId xmlns:a16="http://schemas.microsoft.com/office/drawing/2014/main" id="{23FEB2AF-68B9-6D60-AFB1-C8670E6B2BB6}"/>
               </a:ext>
             </a:extLst>
           </p:cNvPr>
@@ -5521,7 +5515,7 @@
             <a:hlinkClick r:id="" action="ppaction://media"/>
             <a:extLst>
               <a:ext uri="{FF2B5EF4-FFF2-40B4-BE49-F238E27FC236}">
-                <a16:creationId xmlns:a16="http://schemas.microsoft.com/office/drawing/2014/main" id="{BD387F2D-073F-7477-ED47-3987EC7DE21F}"/>
+                <a16:creationId xmlns:a16="http://schemas.microsoft.com/office/drawing/2014/main" id="{682106DF-E4D7-6895-A691-3F5FA47FC51B}"/>
               </a:ext>
             </a:extLst>
           </p:cNvPr>
@@ -5556,7 +5550,7 @@
     </p:spTree>
     <p:extLst>
       <p:ext uri="{BB962C8B-B14F-4D97-AF65-F5344CB8AC3E}">
-        <p14:creationId xmlns:p14="http://schemas.microsoft.com/office/powerpoint/2010/main" val="3929417897"/>
+        <p14:creationId xmlns:p14="http://schemas.microsoft.com/office/powerpoint/2010/main" val="2226360046"/>
       </p:ext>
     </p:extLst>
   </p:cSld>
